--- a/lectures/Lecture_05/slides/Lecture_05_Convolutional_Neural_Networks.pptx
+++ b/lectures/Lecture_05/slides/Lecture_05_Convolutional_Neural_Networks.pptx
@@ -6040,7 +6040,7 @@
                 </a:solidFill>
                 <a:latin typeface="Calibri"/>
               </a:rPr>
-              <a:t>Implement conv2d with im2col and max pooling from scratch and match torch.nn.functional to 1e-5; apply hand-built edge kernels to see what convolution does; build and train a CNN on shapes to roughly 99%, beating the linear baseline from Lecture 1 by ~35 points; then visualise the learned first-layer filters.</a:t>
+              <a:t>Implement conv2d with im2col and max pooling from scratch and match torch.nn.functional to 1e-5; apply hand-built edge kernels to see what convolution does; train a CNN to ~99% and compare it against an MLP on accuracy, parameter count and — the decisive test — accuracy on translated images; then visualise the learned first-layer filters and measure the receptive field.</a:t>
             </a:r>
           </a:p>
         </p:txBody>
@@ -7627,8 +7627,8 @@
         </p:nvSpPr>
         <p:spPr>
           <a:xfrm>
-            <a:off x="658368" y="1883664"/>
-            <a:ext cx="146304" cy="146304"/>
+            <a:off x="658368" y="1837944"/>
+            <a:ext cx="128016" cy="128016"/>
           </a:xfrm>
           <a:prstGeom prst="rect">
             <a:avLst/>
@@ -7671,8 +7671,8 @@
         </p:nvSpPr>
         <p:spPr>
           <a:xfrm>
-            <a:off x="1042416" y="1700784"/>
-            <a:ext cx="10490911" cy="640080"/>
+            <a:off x="1024128" y="1691640"/>
+            <a:ext cx="10509199" cy="621792"/>
           </a:xfrm>
           <a:prstGeom prst="rect">
             <a:avLst/>
@@ -7713,8 +7713,8 @@
         </p:nvSpPr>
         <p:spPr>
           <a:xfrm>
-            <a:off x="658368" y="2596896"/>
-            <a:ext cx="146304" cy="146304"/>
+            <a:off x="658368" y="2514600"/>
+            <a:ext cx="128016" cy="128016"/>
           </a:xfrm>
           <a:prstGeom prst="rect">
             <a:avLst/>
@@ -7757,8 +7757,8 @@
         </p:nvSpPr>
         <p:spPr>
           <a:xfrm>
-            <a:off x="1042416" y="2414016"/>
-            <a:ext cx="10490911" cy="640080"/>
+            <a:off x="1024128" y="2368296"/>
+            <a:ext cx="10509199" cy="621792"/>
           </a:xfrm>
           <a:prstGeom prst="rect">
             <a:avLst/>
@@ -7799,8 +7799,8 @@
         </p:nvSpPr>
         <p:spPr>
           <a:xfrm>
-            <a:off x="658368" y="3310128"/>
-            <a:ext cx="146304" cy="146304"/>
+            <a:off x="658368" y="3191256"/>
+            <a:ext cx="128016" cy="128016"/>
           </a:xfrm>
           <a:prstGeom prst="rect">
             <a:avLst/>
@@ -7843,8 +7843,8 @@
         </p:nvSpPr>
         <p:spPr>
           <a:xfrm>
-            <a:off x="1042416" y="3127248"/>
-            <a:ext cx="10490911" cy="640080"/>
+            <a:off x="1024128" y="3044952"/>
+            <a:ext cx="10509199" cy="621792"/>
           </a:xfrm>
           <a:prstGeom prst="rect">
             <a:avLst/>
@@ -7885,8 +7885,8 @@
         </p:nvSpPr>
         <p:spPr>
           <a:xfrm>
-            <a:off x="658368" y="4023360"/>
-            <a:ext cx="146304" cy="146304"/>
+            <a:off x="658368" y="3867912"/>
+            <a:ext cx="128016" cy="128016"/>
           </a:xfrm>
           <a:prstGeom prst="rect">
             <a:avLst/>
@@ -7929,8 +7929,8 @@
         </p:nvSpPr>
         <p:spPr>
           <a:xfrm>
-            <a:off x="1042416" y="3840480"/>
-            <a:ext cx="10490911" cy="640080"/>
+            <a:off x="1024128" y="3721608"/>
+            <a:ext cx="10509199" cy="621792"/>
           </a:xfrm>
           <a:prstGeom prst="rect">
             <a:avLst/>
@@ -7971,8 +7971,8 @@
         </p:nvSpPr>
         <p:spPr>
           <a:xfrm>
-            <a:off x="658368" y="4736592"/>
-            <a:ext cx="146304" cy="146304"/>
+            <a:off x="658368" y="4544568"/>
+            <a:ext cx="128016" cy="128016"/>
           </a:xfrm>
           <a:prstGeom prst="rect">
             <a:avLst/>
@@ -8015,8 +8015,8 @@
         </p:nvSpPr>
         <p:spPr>
           <a:xfrm>
-            <a:off x="1042416" y="4553712"/>
-            <a:ext cx="10490911" cy="640080"/>
+            <a:off x="1024128" y="4398264"/>
+            <a:ext cx="10509199" cy="621792"/>
           </a:xfrm>
           <a:prstGeom prst="rect">
             <a:avLst/>
@@ -8057,8 +8057,8 @@
         </p:nvSpPr>
         <p:spPr>
           <a:xfrm>
-            <a:off x="658368" y="5449824"/>
-            <a:ext cx="146304" cy="146304"/>
+            <a:off x="658368" y="5221224"/>
+            <a:ext cx="128016" cy="128016"/>
           </a:xfrm>
           <a:prstGeom prst="rect">
             <a:avLst/>
@@ -8101,8 +8101,8 @@
         </p:nvSpPr>
         <p:spPr>
           <a:xfrm>
-            <a:off x="1042416" y="5266944"/>
-            <a:ext cx="10490911" cy="640080"/>
+            <a:off x="1024128" y="5074920"/>
+            <a:ext cx="10509199" cy="621792"/>
           </a:xfrm>
           <a:prstGeom prst="rect">
             <a:avLst/>
@@ -9073,8 +9073,8 @@
         </p:nvSpPr>
         <p:spPr>
           <a:xfrm>
-            <a:off x="658368" y="1764792"/>
-            <a:ext cx="502920" cy="457200"/>
+            <a:off x="658368" y="1728216"/>
+            <a:ext cx="502920" cy="530352"/>
           </a:xfrm>
           <a:prstGeom prst="rect">
             <a:avLst/>
@@ -9115,8 +9115,8 @@
         </p:nvSpPr>
         <p:spPr>
           <a:xfrm>
-            <a:off x="1344168" y="1783080"/>
-            <a:ext cx="10189159" cy="457200"/>
+            <a:off x="1344168" y="1728216"/>
+            <a:ext cx="10189159" cy="530352"/>
           </a:xfrm>
           <a:prstGeom prst="rect">
             <a:avLst/>
@@ -9157,7 +9157,7 @@
         </p:nvSpPr>
         <p:spPr>
           <a:xfrm>
-            <a:off x="658368" y="2267712"/>
+            <a:off x="658368" y="2276856"/>
             <a:ext cx="10874959" cy="9525"/>
           </a:xfrm>
           <a:prstGeom prst="rect">
@@ -9201,8 +9201,8 @@
         </p:nvSpPr>
         <p:spPr>
           <a:xfrm>
-            <a:off x="658368" y="2368296"/>
-            <a:ext cx="502920" cy="457200"/>
+            <a:off x="658368" y="2331720"/>
+            <a:ext cx="502920" cy="530352"/>
           </a:xfrm>
           <a:prstGeom prst="rect">
             <a:avLst/>
@@ -9243,8 +9243,8 @@
         </p:nvSpPr>
         <p:spPr>
           <a:xfrm>
-            <a:off x="1344168" y="2386584"/>
-            <a:ext cx="10189159" cy="457200"/>
+            <a:off x="1344168" y="2331720"/>
+            <a:ext cx="10189159" cy="530352"/>
           </a:xfrm>
           <a:prstGeom prst="rect">
             <a:avLst/>
@@ -9285,7 +9285,7 @@
         </p:nvSpPr>
         <p:spPr>
           <a:xfrm>
-            <a:off x="658368" y="2871216"/>
+            <a:off x="658368" y="2880360"/>
             <a:ext cx="10874959" cy="9525"/>
           </a:xfrm>
           <a:prstGeom prst="rect">
@@ -9329,8 +9329,8 @@
         </p:nvSpPr>
         <p:spPr>
           <a:xfrm>
-            <a:off x="658368" y="2971800"/>
-            <a:ext cx="502920" cy="457200"/>
+            <a:off x="658368" y="2935224"/>
+            <a:ext cx="502920" cy="530352"/>
           </a:xfrm>
           <a:prstGeom prst="rect">
             <a:avLst/>
@@ -9371,8 +9371,8 @@
         </p:nvSpPr>
         <p:spPr>
           <a:xfrm>
-            <a:off x="1344168" y="2990088"/>
-            <a:ext cx="10189159" cy="457200"/>
+            <a:off x="1344168" y="2935224"/>
+            <a:ext cx="10189159" cy="530352"/>
           </a:xfrm>
           <a:prstGeom prst="rect">
             <a:avLst/>
@@ -9413,7 +9413,7 @@
         </p:nvSpPr>
         <p:spPr>
           <a:xfrm>
-            <a:off x="658368" y="3474720"/>
+            <a:off x="658368" y="3483864"/>
             <a:ext cx="10874959" cy="9525"/>
           </a:xfrm>
           <a:prstGeom prst="rect">
@@ -9457,8 +9457,8 @@
         </p:nvSpPr>
         <p:spPr>
           <a:xfrm>
-            <a:off x="658368" y="3575304"/>
-            <a:ext cx="502920" cy="457200"/>
+            <a:off x="658368" y="3538728"/>
+            <a:ext cx="502920" cy="530352"/>
           </a:xfrm>
           <a:prstGeom prst="rect">
             <a:avLst/>
@@ -9499,8 +9499,8 @@
         </p:nvSpPr>
         <p:spPr>
           <a:xfrm>
-            <a:off x="1344168" y="3593592"/>
-            <a:ext cx="10189159" cy="457200"/>
+            <a:off x="1344168" y="3538728"/>
+            <a:ext cx="10189159" cy="530352"/>
           </a:xfrm>
           <a:prstGeom prst="rect">
             <a:avLst/>
@@ -9541,7 +9541,7 @@
         </p:nvSpPr>
         <p:spPr>
           <a:xfrm>
-            <a:off x="658368" y="4078224"/>
+            <a:off x="658368" y="4087368"/>
             <a:ext cx="10874959" cy="9525"/>
           </a:xfrm>
           <a:prstGeom prst="rect">
@@ -9585,8 +9585,8 @@
         </p:nvSpPr>
         <p:spPr>
           <a:xfrm>
-            <a:off x="658368" y="4178808"/>
-            <a:ext cx="502920" cy="457200"/>
+            <a:off x="658368" y="4142232"/>
+            <a:ext cx="502920" cy="530352"/>
           </a:xfrm>
           <a:prstGeom prst="rect">
             <a:avLst/>
@@ -9627,8 +9627,8 @@
         </p:nvSpPr>
         <p:spPr>
           <a:xfrm>
-            <a:off x="1344168" y="4197096"/>
-            <a:ext cx="10189159" cy="457200"/>
+            <a:off x="1344168" y="4142232"/>
+            <a:ext cx="10189159" cy="530352"/>
           </a:xfrm>
           <a:prstGeom prst="rect">
             <a:avLst/>
@@ -9669,7 +9669,7 @@
         </p:nvSpPr>
         <p:spPr>
           <a:xfrm>
-            <a:off x="658368" y="4681728"/>
+            <a:off x="658368" y="4690872"/>
             <a:ext cx="10874959" cy="9525"/>
           </a:xfrm>
           <a:prstGeom prst="rect">
@@ -9713,8 +9713,8 @@
         </p:nvSpPr>
         <p:spPr>
           <a:xfrm>
-            <a:off x="658368" y="4782312"/>
-            <a:ext cx="502920" cy="457200"/>
+            <a:off x="658368" y="4745736"/>
+            <a:ext cx="502920" cy="530352"/>
           </a:xfrm>
           <a:prstGeom prst="rect">
             <a:avLst/>
@@ -9755,8 +9755,8 @@
         </p:nvSpPr>
         <p:spPr>
           <a:xfrm>
-            <a:off x="1344168" y="4800600"/>
-            <a:ext cx="10189159" cy="457200"/>
+            <a:off x="1344168" y="4745736"/>
+            <a:ext cx="10189159" cy="530352"/>
           </a:xfrm>
           <a:prstGeom prst="rect">
             <a:avLst/>
@@ -9797,7 +9797,7 @@
         </p:nvSpPr>
         <p:spPr>
           <a:xfrm>
-            <a:off x="658368" y="5285232"/>
+            <a:off x="658368" y="5294376"/>
             <a:ext cx="10874959" cy="9525"/>
           </a:xfrm>
           <a:prstGeom prst="rect">
@@ -9841,8 +9841,8 @@
         </p:nvSpPr>
         <p:spPr>
           <a:xfrm>
-            <a:off x="658368" y="5495544"/>
-            <a:ext cx="10874959" cy="457200"/>
+            <a:off x="658368" y="5422392"/>
+            <a:ext cx="10874959" cy="411480"/>
           </a:xfrm>
           <a:prstGeom prst="rect">
             <a:avLst/>
@@ -9864,7 +9864,7 @@
               </a:spcAft>
             </a:pPr>
             <a:r>
-              <a:rPr sz="1400" b="0" i="1">
+              <a:rPr sz="1300" b="0" i="1">
                 <a:solidFill>
                   <a:srgbClr val="5A6375"/>
                 </a:solidFill>
